--- a/Internal Learning/2025/Rules Engine/Week 1/RulesEngineWeek1.pptx
+++ b/Internal Learning/2025/Rules Engine/Week 1/RulesEngineWeek1.pptx
@@ -5,7 +5,7 @@
     <p:sldMasterId id="2147483648" r:id="rId1"/>
   </p:sldMasterIdLst>
   <p:notesMasterIdLst>
-    <p:notesMasterId r:id="rId13"/>
+    <p:notesMasterId r:id="rId14"/>
   </p:notesMasterIdLst>
   <p:sldIdLst>
     <p:sldId id="256" r:id="rId2"/>
@@ -19,6 +19,7 @@
     <p:sldId id="264" r:id="rId10"/>
     <p:sldId id="265" r:id="rId11"/>
     <p:sldId id="266" r:id="rId12"/>
+    <p:sldId id="267" r:id="rId13"/>
   </p:sldIdLst>
   <p:sldSz cx="12192000" cy="6858000"/>
   <p:notesSz cx="6858000" cy="9144000"/>
@@ -805,6 +806,117 @@
     <p:extLst>
       <p:ext uri="{BB962C8B-B14F-4D97-AF65-F5344CB8AC3E}">
         <p14:creationId xmlns:p14="http://schemas.microsoft.com/office/powerpoint/2010/main" val="3602742261"/>
+      </p:ext>
+    </p:extLst>
+  </p:cSld>
+  <p:clrMapOvr>
+    <a:masterClrMapping/>
+  </p:clrMapOvr>
+</p:notes>
+</file>
+
+<file path=ppt/notesSlides/notesSlide12.xml><?xml version="1.0" encoding="utf-8"?>
+<p:notes xmlns:a="http://schemas.openxmlformats.org/drawingml/2006/main" xmlns:r="http://schemas.openxmlformats.org/officeDocument/2006/relationships" xmlns:p="http://schemas.openxmlformats.org/presentationml/2006/main">
+  <p:cSld>
+    <p:spTree>
+      <p:nvGrpSpPr>
+        <p:cNvPr id="1" name="">
+          <a:extLst>
+            <a:ext uri="{FF2B5EF4-FFF2-40B4-BE49-F238E27FC236}">
+              <a16:creationId xmlns:a16="http://schemas.microsoft.com/office/drawing/2014/main" id="{BEA7246D-AA53-489A-7521-C6DF8DBE880C}"/>
+            </a:ext>
+          </a:extLst>
+        </p:cNvPr>
+        <p:cNvGrpSpPr/>
+        <p:nvPr/>
+      </p:nvGrpSpPr>
+      <p:grpSpPr>
+        <a:xfrm>
+          <a:off x="0" y="0"/>
+          <a:ext cx="0" cy="0"/>
+          <a:chOff x="0" y="0"/>
+          <a:chExt cx="0" cy="0"/>
+        </a:xfrm>
+      </p:grpSpPr>
+      <p:sp>
+        <p:nvSpPr>
+          <p:cNvPr id="2" name="Slide Image Placeholder 1">
+            <a:extLst>
+              <a:ext uri="{FF2B5EF4-FFF2-40B4-BE49-F238E27FC236}">
+                <a16:creationId xmlns:a16="http://schemas.microsoft.com/office/drawing/2014/main" id="{0E83001E-0D17-93B5-CC24-D6F7AA654DD1}"/>
+              </a:ext>
+            </a:extLst>
+          </p:cNvPr>
+          <p:cNvSpPr>
+            <a:spLocks noGrp="1" noRot="1" noChangeAspect="1"/>
+          </p:cNvSpPr>
+          <p:nvPr>
+            <p:ph type="sldImg"/>
+          </p:nvPr>
+        </p:nvSpPr>
+        <p:spPr/>
+      </p:sp>
+      <p:sp>
+        <p:nvSpPr>
+          <p:cNvPr id="3" name="Notes Placeholder 2">
+            <a:extLst>
+              <a:ext uri="{FF2B5EF4-FFF2-40B4-BE49-F238E27FC236}">
+                <a16:creationId xmlns:a16="http://schemas.microsoft.com/office/drawing/2014/main" id="{641932DA-FAB6-7441-639D-57F8DFDE7F35}"/>
+              </a:ext>
+            </a:extLst>
+          </p:cNvPr>
+          <p:cNvSpPr>
+            <a:spLocks noGrp="1"/>
+          </p:cNvSpPr>
+          <p:nvPr>
+            <p:ph type="body" idx="1"/>
+          </p:nvPr>
+        </p:nvSpPr>
+        <p:spPr/>
+        <p:txBody>
+          <a:bodyPr/>
+          <a:lstStyle/>
+          <a:p>
+            <a:r>
+              <a:rPr lang="en-US" dirty="0"/>
+              <a:t>Recap the key points and praise the participation. Give people confidence that this knowledge is useful and will grow in future sessions.</a:t>
+            </a:r>
+          </a:p>
+        </p:txBody>
+      </p:sp>
+      <p:sp>
+        <p:nvSpPr>
+          <p:cNvPr id="4" name="Slide Number Placeholder 3">
+            <a:extLst>
+              <a:ext uri="{FF2B5EF4-FFF2-40B4-BE49-F238E27FC236}">
+                <a16:creationId xmlns:a16="http://schemas.microsoft.com/office/drawing/2014/main" id="{5AD9B320-2F99-C21B-DC4B-462EA0490117}"/>
+              </a:ext>
+            </a:extLst>
+          </p:cNvPr>
+          <p:cNvSpPr>
+            <a:spLocks noGrp="1"/>
+          </p:cNvSpPr>
+          <p:nvPr>
+            <p:ph type="sldNum" sz="quarter" idx="5"/>
+          </p:nvPr>
+        </p:nvSpPr>
+        <p:spPr/>
+        <p:txBody>
+          <a:bodyPr/>
+          <a:lstStyle/>
+          <a:p>
+            <a:fld id="{B8212B91-E0CD-4A27-8E94-3FFCFB4FB363}" type="slidenum">
+              <a:rPr lang="en-ZA" smtClean="0"/>
+              <a:t>12</a:t>
+            </a:fld>
+            <a:endParaRPr lang="en-ZA"/>
+          </a:p>
+        </p:txBody>
+      </p:sp>
+    </p:spTree>
+    <p:extLst>
+      <p:ext uri="{BB962C8B-B14F-4D97-AF65-F5344CB8AC3E}">
+        <p14:creationId xmlns:p14="http://schemas.microsoft.com/office/powerpoint/2010/main" val="2065976249"/>
       </p:ext>
     </p:extLst>
   </p:cSld>
@@ -5580,6 +5692,269 @@
     <p:extLst>
       <p:ext uri="{BB962C8B-B14F-4D97-AF65-F5344CB8AC3E}">
         <p14:creationId xmlns:p14="http://schemas.microsoft.com/office/powerpoint/2010/main" val="1250869865"/>
+      </p:ext>
+    </p:extLst>
+  </p:cSld>
+  <p:clrMapOvr>
+    <a:masterClrMapping/>
+  </p:clrMapOvr>
+</p:sld>
+</file>
+
+<file path=ppt/slides/slide12.xml><?xml version="1.0" encoding="utf-8"?>
+<p:sld xmlns:a="http://schemas.openxmlformats.org/drawingml/2006/main" xmlns:r="http://schemas.openxmlformats.org/officeDocument/2006/relationships" xmlns:p="http://schemas.openxmlformats.org/presentationml/2006/main">
+  <p:cSld>
+    <p:spTree>
+      <p:nvGrpSpPr>
+        <p:cNvPr id="1" name="">
+          <a:extLst>
+            <a:ext uri="{FF2B5EF4-FFF2-40B4-BE49-F238E27FC236}">
+              <a16:creationId xmlns:a16="http://schemas.microsoft.com/office/drawing/2014/main" id="{F0F8E69F-1990-8DB9-0784-69CE583B1BBD}"/>
+            </a:ext>
+          </a:extLst>
+        </p:cNvPr>
+        <p:cNvGrpSpPr/>
+        <p:nvPr/>
+      </p:nvGrpSpPr>
+      <p:grpSpPr>
+        <a:xfrm>
+          <a:off x="0" y="0"/>
+          <a:ext cx="0" cy="0"/>
+          <a:chOff x="0" y="0"/>
+          <a:chExt cx="0" cy="0"/>
+        </a:xfrm>
+      </p:grpSpPr>
+      <p:pic>
+        <p:nvPicPr>
+          <p:cNvPr id="5" name="Content Placeholder 4" descr="A black background with white and yellow figures">
+            <a:extLst>
+              <a:ext uri="{FF2B5EF4-FFF2-40B4-BE49-F238E27FC236}">
+                <a16:creationId xmlns:a16="http://schemas.microsoft.com/office/drawing/2014/main" id="{D5D01F97-A7D4-70FF-35D6-29CBB74092EC}"/>
+              </a:ext>
+            </a:extLst>
+          </p:cNvPr>
+          <p:cNvPicPr>
+            <a:picLocks noGrp="1" noChangeAspect="1"/>
+          </p:cNvPicPr>
+          <p:nvPr>
+            <p:ph idx="1"/>
+          </p:nvPr>
+        </p:nvPicPr>
+        <p:blipFill>
+          <a:blip r:embed="rId3">
+            <a:extLst>
+              <a:ext uri="{28A0092B-C50C-407E-A947-70E740481C1C}">
+                <a14:useLocalDpi xmlns:a14="http://schemas.microsoft.com/office/drawing/2010/main" val="0"/>
+              </a:ext>
+            </a:extLst>
+          </a:blip>
+          <a:stretch>
+            <a:fillRect/>
+          </a:stretch>
+        </p:blipFill>
+        <p:spPr>
+          <a:xfrm>
+            <a:off x="0" y="101600"/>
+            <a:ext cx="12192000" cy="6858000"/>
+          </a:xfrm>
+        </p:spPr>
+      </p:pic>
+      <p:sp>
+        <p:nvSpPr>
+          <p:cNvPr id="2" name="Title 1">
+            <a:extLst>
+              <a:ext uri="{FF2B5EF4-FFF2-40B4-BE49-F238E27FC236}">
+                <a16:creationId xmlns:a16="http://schemas.microsoft.com/office/drawing/2014/main" id="{A8C3ABFF-2146-4EC5-1C86-8C3C7CCED00F}"/>
+              </a:ext>
+            </a:extLst>
+          </p:cNvPr>
+          <p:cNvSpPr>
+            <a:spLocks noGrp="1"/>
+          </p:cNvSpPr>
+          <p:nvPr>
+            <p:ph type="title"/>
+          </p:nvPr>
+        </p:nvSpPr>
+        <p:spPr/>
+        <p:txBody>
+          <a:bodyPr/>
+          <a:lstStyle/>
+          <a:p>
+            <a:pPr algn="ctr"/>
+            <a:r>
+              <a:rPr lang="en-ZA" b="1" dirty="0">
+                <a:solidFill>
+                  <a:schemeClr val="bg1"/>
+                </a:solidFill>
+                <a:latin typeface="Poppins" panose="00000500000000000000" pitchFamily="2" charset="0"/>
+                <a:cs typeface="Poppins" panose="00000500000000000000" pitchFamily="2" charset="0"/>
+              </a:rPr>
+              <a:t>Wrap-Up</a:t>
+            </a:r>
+            <a:endParaRPr lang="en-ZA" dirty="0">
+              <a:solidFill>
+                <a:schemeClr val="bg1"/>
+              </a:solidFill>
+              <a:latin typeface="Poppins" panose="00000500000000000000" pitchFamily="2" charset="0"/>
+              <a:cs typeface="Poppins" panose="00000500000000000000" pitchFamily="2" charset="0"/>
+            </a:endParaRPr>
+          </a:p>
+        </p:txBody>
+      </p:sp>
+      <p:sp>
+        <p:nvSpPr>
+          <p:cNvPr id="6" name="TextBox 5">
+            <a:extLst>
+              <a:ext uri="{FF2B5EF4-FFF2-40B4-BE49-F238E27FC236}">
+                <a16:creationId xmlns:a16="http://schemas.microsoft.com/office/drawing/2014/main" id="{FD561E40-6D0F-8796-0F95-26C00EF40776}"/>
+              </a:ext>
+            </a:extLst>
+          </p:cNvPr>
+          <p:cNvSpPr txBox="1"/>
+          <p:nvPr/>
+        </p:nvSpPr>
+        <p:spPr>
+          <a:xfrm>
+            <a:off x="2318326" y="1866179"/>
+            <a:ext cx="8137236" cy="2818720"/>
+          </a:xfrm>
+          <a:prstGeom prst="rect">
+            <a:avLst/>
+          </a:prstGeom>
+          <a:noFill/>
+        </p:spPr>
+        <p:txBody>
+          <a:bodyPr wrap="square" rtlCol="0">
+            <a:spAutoFit/>
+          </a:bodyPr>
+          <a:lstStyle/>
+          <a:p>
+            <a:pPr marL="342900" indent="-342900">
+              <a:lnSpc>
+                <a:spcPct val="150000"/>
+              </a:lnSpc>
+              <a:buFont typeface="Arial" panose="020B0604020202020204" pitchFamily="34" charset="0"/>
+              <a:buChar char="•"/>
+            </a:pPr>
+            <a:r>
+              <a:rPr lang="en-US" sz="2000" b="1" dirty="0">
+                <a:solidFill>
+                  <a:schemeClr val="bg1"/>
+                </a:solidFill>
+                <a:latin typeface="Poppins" panose="00000500000000000000" pitchFamily="2" charset="0"/>
+                <a:cs typeface="Poppins" panose="00000500000000000000" pitchFamily="2" charset="0"/>
+              </a:rPr>
+              <a:t>We learned:</a:t>
+            </a:r>
+          </a:p>
+          <a:p>
+            <a:pPr marL="800100" lvl="1" indent="-342900">
+              <a:lnSpc>
+                <a:spcPct val="150000"/>
+              </a:lnSpc>
+              <a:buFont typeface="Arial" panose="020B0604020202020204" pitchFamily="34" charset="0"/>
+              <a:buChar char="•"/>
+            </a:pPr>
+            <a:r>
+              <a:rPr lang="en-US" sz="2000" b="1" dirty="0">
+                <a:solidFill>
+                  <a:schemeClr val="bg1"/>
+                </a:solidFill>
+                <a:latin typeface="Poppins" panose="00000500000000000000" pitchFamily="2" charset="0"/>
+                <a:cs typeface="Poppins" panose="00000500000000000000" pitchFamily="2" charset="0"/>
+              </a:rPr>
+              <a:t>What rule engines are</a:t>
+            </a:r>
+          </a:p>
+          <a:p>
+            <a:pPr marL="800100" lvl="1" indent="-342900">
+              <a:lnSpc>
+                <a:spcPct val="150000"/>
+              </a:lnSpc>
+              <a:buFont typeface="Arial" panose="020B0604020202020204" pitchFamily="34" charset="0"/>
+              <a:buChar char="•"/>
+            </a:pPr>
+            <a:r>
+              <a:rPr lang="en-US" sz="2000" b="1" dirty="0">
+                <a:solidFill>
+                  <a:schemeClr val="bg1"/>
+                </a:solidFill>
+                <a:latin typeface="Poppins" panose="00000500000000000000" pitchFamily="2" charset="0"/>
+                <a:cs typeface="Poppins" panose="00000500000000000000" pitchFamily="2" charset="0"/>
+              </a:rPr>
+              <a:t>How they differ from hardcoded logic</a:t>
+            </a:r>
+          </a:p>
+          <a:p>
+            <a:pPr marL="800100" lvl="1" indent="-342900">
+              <a:lnSpc>
+                <a:spcPct val="150000"/>
+              </a:lnSpc>
+              <a:buFont typeface="Arial" panose="020B0604020202020204" pitchFamily="34" charset="0"/>
+              <a:buChar char="•"/>
+            </a:pPr>
+            <a:r>
+              <a:rPr lang="en-US" sz="2000" b="1" dirty="0">
+                <a:solidFill>
+                  <a:schemeClr val="bg1"/>
+                </a:solidFill>
+                <a:latin typeface="Poppins" panose="00000500000000000000" pitchFamily="2" charset="0"/>
+                <a:cs typeface="Poppins" panose="00000500000000000000" pitchFamily="2" charset="0"/>
+              </a:rPr>
+              <a:t>Why underwriting is a great fit</a:t>
+            </a:r>
+          </a:p>
+          <a:p>
+            <a:pPr marL="800100" lvl="1" indent="-342900">
+              <a:lnSpc>
+                <a:spcPct val="150000"/>
+              </a:lnSpc>
+              <a:buFont typeface="Arial" panose="020B0604020202020204" pitchFamily="34" charset="0"/>
+              <a:buChar char="•"/>
+            </a:pPr>
+            <a:r>
+              <a:rPr lang="en-US" sz="2000" b="1" dirty="0">
+                <a:solidFill>
+                  <a:schemeClr val="bg1"/>
+                </a:solidFill>
+                <a:latin typeface="Poppins" panose="00000500000000000000" pitchFamily="2" charset="0"/>
+                <a:cs typeface="Poppins" panose="00000500000000000000" pitchFamily="2" charset="0"/>
+              </a:rPr>
+              <a:t>How to represent logic in a rule matrix</a:t>
+            </a:r>
+          </a:p>
+          <a:p>
+            <a:pPr marL="342900" indent="-342900">
+              <a:lnSpc>
+                <a:spcPct val="150000"/>
+              </a:lnSpc>
+              <a:buFont typeface="Arial" panose="020B0604020202020204" pitchFamily="34" charset="0"/>
+              <a:buChar char="•"/>
+            </a:pPr>
+            <a:r>
+              <a:rPr lang="en-US" sz="2000" b="1" dirty="0">
+                <a:solidFill>
+                  <a:schemeClr val="bg1"/>
+                </a:solidFill>
+                <a:latin typeface="Poppins" panose="00000500000000000000" pitchFamily="2" charset="0"/>
+                <a:cs typeface="Poppins" panose="00000500000000000000" pitchFamily="2" charset="0"/>
+              </a:rPr>
+              <a:t>Next week: We'll build a basic rule engine in code</a:t>
+            </a:r>
+            <a:endParaRPr lang="en-US" sz="2000" dirty="0">
+              <a:solidFill>
+                <a:schemeClr val="bg1"/>
+              </a:solidFill>
+              <a:latin typeface="Poppins" panose="00000500000000000000" pitchFamily="2" charset="0"/>
+              <a:cs typeface="Poppins" panose="00000500000000000000" pitchFamily="2" charset="0"/>
+            </a:endParaRPr>
+          </a:p>
+        </p:txBody>
+      </p:sp>
+    </p:spTree>
+    <p:extLst>
+      <p:ext uri="{BB962C8B-B14F-4D97-AF65-F5344CB8AC3E}">
+        <p14:creationId xmlns:p14="http://schemas.microsoft.com/office/powerpoint/2010/main" val="3607287636"/>
       </p:ext>
     </p:extLst>
   </p:cSld>
